--- a/ゲーム科1年/00_前期/ゲームプログラミングⅢ/ゲーム数学/実習/01_2点間の距離.pptx
+++ b/ゲーム科1年/00_前期/ゲームプログラミングⅢ/ゲーム数学/実習/01_2点間の距離.pptx
@@ -265,7 +265,7 @@
           <a:p>
             <a:fld id="{E9CC885B-4903-4D54-9A93-00025F12DED9}" type="datetimeFigureOut">
               <a:rPr kumimoji="1" lang="ja-JP" altLang="en-US" smtClean="0"/>
-              <a:t>2024/10/31</a:t>
+              <a:t>2026/2/19</a:t>
             </a:fld>
             <a:endParaRPr kumimoji="1" lang="ja-JP" altLang="en-US"/>
           </a:p>
@@ -495,7 +495,7 @@
           <a:p>
             <a:fld id="{E9CC885B-4903-4D54-9A93-00025F12DED9}" type="datetimeFigureOut">
               <a:rPr kumimoji="1" lang="ja-JP" altLang="en-US" smtClean="0"/>
-              <a:t>2024/10/31</a:t>
+              <a:t>2026/2/19</a:t>
             </a:fld>
             <a:endParaRPr kumimoji="1" lang="ja-JP" altLang="en-US"/>
           </a:p>
@@ -735,7 +735,7 @@
           <a:p>
             <a:fld id="{E9CC885B-4903-4D54-9A93-00025F12DED9}" type="datetimeFigureOut">
               <a:rPr kumimoji="1" lang="ja-JP" altLang="en-US" smtClean="0"/>
-              <a:t>2024/10/31</a:t>
+              <a:t>2026/2/19</a:t>
             </a:fld>
             <a:endParaRPr kumimoji="1" lang="ja-JP" altLang="en-US"/>
           </a:p>
@@ -965,7 +965,7 @@
           <a:p>
             <a:fld id="{E9CC885B-4903-4D54-9A93-00025F12DED9}" type="datetimeFigureOut">
               <a:rPr kumimoji="1" lang="ja-JP" altLang="en-US" smtClean="0"/>
-              <a:t>2024/10/31</a:t>
+              <a:t>2026/2/19</a:t>
             </a:fld>
             <a:endParaRPr kumimoji="1" lang="ja-JP" altLang="en-US"/>
           </a:p>
@@ -1240,7 +1240,7 @@
           <a:p>
             <a:fld id="{E9CC885B-4903-4D54-9A93-00025F12DED9}" type="datetimeFigureOut">
               <a:rPr kumimoji="1" lang="ja-JP" altLang="en-US" smtClean="0"/>
-              <a:t>2024/10/31</a:t>
+              <a:t>2026/2/19</a:t>
             </a:fld>
             <a:endParaRPr kumimoji="1" lang="ja-JP" altLang="en-US"/>
           </a:p>
@@ -1569,7 +1569,7 @@
           <a:p>
             <a:fld id="{E9CC885B-4903-4D54-9A93-00025F12DED9}" type="datetimeFigureOut">
               <a:rPr kumimoji="1" lang="ja-JP" altLang="en-US" smtClean="0"/>
-              <a:t>2024/10/31</a:t>
+              <a:t>2026/2/19</a:t>
             </a:fld>
             <a:endParaRPr kumimoji="1" lang="ja-JP" altLang="en-US"/>
           </a:p>
@@ -2045,7 +2045,7 @@
           <a:p>
             <a:fld id="{E9CC885B-4903-4D54-9A93-00025F12DED9}" type="datetimeFigureOut">
               <a:rPr kumimoji="1" lang="ja-JP" altLang="en-US" smtClean="0"/>
-              <a:t>2024/10/31</a:t>
+              <a:t>2026/2/19</a:t>
             </a:fld>
             <a:endParaRPr kumimoji="1" lang="ja-JP" altLang="en-US"/>
           </a:p>
@@ -2186,7 +2186,7 @@
           <a:p>
             <a:fld id="{E9CC885B-4903-4D54-9A93-00025F12DED9}" type="datetimeFigureOut">
               <a:rPr kumimoji="1" lang="ja-JP" altLang="en-US" smtClean="0"/>
-              <a:t>2024/10/31</a:t>
+              <a:t>2026/2/19</a:t>
             </a:fld>
             <a:endParaRPr kumimoji="1" lang="ja-JP" altLang="en-US"/>
           </a:p>
@@ -2299,7 +2299,7 @@
           <a:p>
             <a:fld id="{E9CC885B-4903-4D54-9A93-00025F12DED9}" type="datetimeFigureOut">
               <a:rPr kumimoji="1" lang="ja-JP" altLang="en-US" smtClean="0"/>
-              <a:t>2024/10/31</a:t>
+              <a:t>2026/2/19</a:t>
             </a:fld>
             <a:endParaRPr kumimoji="1" lang="ja-JP" altLang="en-US"/>
           </a:p>
@@ -2642,7 +2642,7 @@
           <a:p>
             <a:fld id="{E9CC885B-4903-4D54-9A93-00025F12DED9}" type="datetimeFigureOut">
               <a:rPr kumimoji="1" lang="ja-JP" altLang="en-US" smtClean="0"/>
-              <a:t>2024/10/31</a:t>
+              <a:t>2026/2/19</a:t>
             </a:fld>
             <a:endParaRPr kumimoji="1" lang="ja-JP" altLang="en-US"/>
           </a:p>
@@ -2930,7 +2930,7 @@
           <a:p>
             <a:fld id="{E9CC885B-4903-4D54-9A93-00025F12DED9}" type="datetimeFigureOut">
               <a:rPr kumimoji="1" lang="ja-JP" altLang="en-US" smtClean="0"/>
-              <a:t>2024/10/31</a:t>
+              <a:t>2026/2/19</a:t>
             </a:fld>
             <a:endParaRPr kumimoji="1" lang="ja-JP" altLang="en-US"/>
           </a:p>
@@ -3203,7 +3203,7 @@
           <a:p>
             <a:fld id="{E9CC885B-4903-4D54-9A93-00025F12DED9}" type="datetimeFigureOut">
               <a:rPr kumimoji="1" lang="ja-JP" altLang="en-US" smtClean="0"/>
-              <a:t>2024/10/31</a:t>
+              <a:t>2026/2/19</a:t>
             </a:fld>
             <a:endParaRPr kumimoji="1" lang="ja-JP" altLang="en-US"/>
           </a:p>
@@ -3832,8 +3832,8 @@
           </a:p>
         </p:txBody>
       </p:sp>
-      <mc:AlternateContent xmlns:mc="http://schemas.openxmlformats.org/markup-compatibility/2006">
-        <mc:Choice xmlns:a14="http://schemas.microsoft.com/office/drawing/2010/main" Requires="a14">
+      <mc:AlternateContent xmlns:mc="http://schemas.openxmlformats.org/markup-compatibility/2006" xmlns:a14="http://schemas.microsoft.com/office/drawing/2010/main">
+        <mc:Choice Requires="a14">
           <p:sp>
             <p:nvSpPr>
               <p:cNvPr id="6" name="テキスト ボックス 5">
@@ -4558,7 +4558,7 @@
             </p:txBody>
           </p:sp>
         </mc:Choice>
-        <mc:Fallback>
+        <mc:Fallback xmlns="">
           <p:sp>
             <p:nvSpPr>
               <p:cNvPr id="6" name="テキスト ボックス 5">
@@ -4683,7 +4683,7 @@
         <p:spPr>
           <a:xfrm>
             <a:off x="567542" y="1216429"/>
-            <a:ext cx="8592417" cy="461665"/>
+            <a:ext cx="8707833" cy="461665"/>
           </a:xfrm>
           <a:prstGeom prst="rect">
             <a:avLst/>
@@ -4697,7 +4697,11 @@
           <a:lstStyle/>
           <a:p>
             <a:r>
-              <a:rPr kumimoji="1" lang="en-US" altLang="ja-JP" sz="2400" dirty="0"/>
+              <a:rPr kumimoji="1" lang="en-US" altLang="ja-JP" sz="2400" b="1" dirty="0">
+                <a:solidFill>
+                  <a:srgbClr val="FF0000"/>
+                </a:solidFill>
+              </a:rPr>
               <a:t>AutoDoor.cpp</a:t>
             </a:r>
             <a:r>
@@ -4714,10 +4718,10 @@
       </p:sp>
       <p:pic>
         <p:nvPicPr>
-          <p:cNvPr id="7" name="図 6">
-            <a:extLst>
-              <a:ext uri="{FF2B5EF4-FFF2-40B4-BE49-F238E27FC236}">
-                <a16:creationId xmlns:a16="http://schemas.microsoft.com/office/drawing/2014/main" id="{0BBAC70E-1669-4D64-AA42-7BEB638B0C9D}"/>
+          <p:cNvPr id="3" name="図 2">
+            <a:extLst>
+              <a:ext uri="{FF2B5EF4-FFF2-40B4-BE49-F238E27FC236}">
+                <a16:creationId xmlns:a16="http://schemas.microsoft.com/office/drawing/2014/main" id="{57F072BD-776E-457E-B345-2B6A4D5CDB3F}"/>
               </a:ext>
             </a:extLst>
           </p:cNvPr>
@@ -4727,13 +4731,7 @@
           <p:nvPr/>
         </p:nvPicPr>
         <p:blipFill>
-          <a:blip r:embed="rId2">
-            <a:extLst>
-              <a:ext uri="{28A0092B-C50C-407E-A947-70E740481C1C}">
-                <a14:useLocalDpi xmlns:a14="http://schemas.microsoft.com/office/drawing/2010/main" val="0"/>
-              </a:ext>
-            </a:extLst>
-          </a:blip>
+          <a:blip r:embed="rId2"/>
           <a:stretch>
             <a:fillRect/>
           </a:stretch>
@@ -4741,7 +4739,7 @@
         <p:spPr>
           <a:xfrm>
             <a:off x="567542" y="1817794"/>
-            <a:ext cx="10299878" cy="4105024"/>
+            <a:ext cx="8592417" cy="4660581"/>
           </a:xfrm>
           <a:prstGeom prst="rect">
             <a:avLst/>
